--- a/manuscript/figures/process-schematic-revised.pptx
+++ b/manuscript/figures/process-schematic-revised.pptx
@@ -259,7 +259,7 @@
           <a:p>
             <a:fld id="{E6CDFB6E-9C33-264E-B094-69C2B179F5E9}" type="datetimeFigureOut">
               <a:rPr lang="en-US" smtClean="0"/>
-              <a:t>8/11/26</a:t>
+              <a:t>9/22/26</a:t>
             </a:fld>
             <a:endParaRPr lang="en-US"/>
           </a:p>
@@ -457,7 +457,7 @@
           <a:p>
             <a:fld id="{E6CDFB6E-9C33-264E-B094-69C2B179F5E9}" type="datetimeFigureOut">
               <a:rPr lang="en-US" smtClean="0"/>
-              <a:t>8/11/26</a:t>
+              <a:t>9/22/26</a:t>
             </a:fld>
             <a:endParaRPr lang="en-US"/>
           </a:p>
@@ -665,7 +665,7 @@
           <a:p>
             <a:fld id="{E6CDFB6E-9C33-264E-B094-69C2B179F5E9}" type="datetimeFigureOut">
               <a:rPr lang="en-US" smtClean="0"/>
-              <a:t>8/11/26</a:t>
+              <a:t>9/22/26</a:t>
             </a:fld>
             <a:endParaRPr lang="en-US"/>
           </a:p>
@@ -863,7 +863,7 @@
           <a:p>
             <a:fld id="{E6CDFB6E-9C33-264E-B094-69C2B179F5E9}" type="datetimeFigureOut">
               <a:rPr lang="en-US" smtClean="0"/>
-              <a:t>8/11/26</a:t>
+              <a:t>9/22/26</a:t>
             </a:fld>
             <a:endParaRPr lang="en-US"/>
           </a:p>
@@ -1138,7 +1138,7 @@
           <a:p>
             <a:fld id="{E6CDFB6E-9C33-264E-B094-69C2B179F5E9}" type="datetimeFigureOut">
               <a:rPr lang="en-US" smtClean="0"/>
-              <a:t>8/11/26</a:t>
+              <a:t>9/22/26</a:t>
             </a:fld>
             <a:endParaRPr lang="en-US"/>
           </a:p>
@@ -1403,7 +1403,7 @@
           <a:p>
             <a:fld id="{E6CDFB6E-9C33-264E-B094-69C2B179F5E9}" type="datetimeFigureOut">
               <a:rPr lang="en-US" smtClean="0"/>
-              <a:t>8/11/26</a:t>
+              <a:t>9/22/26</a:t>
             </a:fld>
             <a:endParaRPr lang="en-US"/>
           </a:p>
@@ -1815,7 +1815,7 @@
           <a:p>
             <a:fld id="{E6CDFB6E-9C33-264E-B094-69C2B179F5E9}" type="datetimeFigureOut">
               <a:rPr lang="en-US" smtClean="0"/>
-              <a:t>8/11/26</a:t>
+              <a:t>9/22/26</a:t>
             </a:fld>
             <a:endParaRPr lang="en-US"/>
           </a:p>
@@ -1956,7 +1956,7 @@
           <a:p>
             <a:fld id="{E6CDFB6E-9C33-264E-B094-69C2B179F5E9}" type="datetimeFigureOut">
               <a:rPr lang="en-US" smtClean="0"/>
-              <a:t>8/11/26</a:t>
+              <a:t>9/22/26</a:t>
             </a:fld>
             <a:endParaRPr lang="en-US"/>
           </a:p>
@@ -2069,7 +2069,7 @@
           <a:p>
             <a:fld id="{E6CDFB6E-9C33-264E-B094-69C2B179F5E9}" type="datetimeFigureOut">
               <a:rPr lang="en-US" smtClean="0"/>
-              <a:t>8/11/26</a:t>
+              <a:t>9/22/26</a:t>
             </a:fld>
             <a:endParaRPr lang="en-US"/>
           </a:p>
@@ -2380,7 +2380,7 @@
           <a:p>
             <a:fld id="{E6CDFB6E-9C33-264E-B094-69C2B179F5E9}" type="datetimeFigureOut">
               <a:rPr lang="en-US" smtClean="0"/>
-              <a:t>8/11/26</a:t>
+              <a:t>9/22/26</a:t>
             </a:fld>
             <a:endParaRPr lang="en-US"/>
           </a:p>
@@ -2668,7 +2668,7 @@
           <a:p>
             <a:fld id="{E6CDFB6E-9C33-264E-B094-69C2B179F5E9}" type="datetimeFigureOut">
               <a:rPr lang="en-US" smtClean="0"/>
-              <a:t>8/11/26</a:t>
+              <a:t>9/22/26</a:t>
             </a:fld>
             <a:endParaRPr lang="en-US"/>
           </a:p>
@@ -2909,7 +2909,7 @@
           <a:p>
             <a:fld id="{E6CDFB6E-9C33-264E-B094-69C2B179F5E9}" type="datetimeFigureOut">
               <a:rPr lang="en-US" smtClean="0"/>
-              <a:t>8/11/26</a:t>
+              <a:t>9/22/26</a:t>
             </a:fld>
             <a:endParaRPr lang="en-US"/>
           </a:p>
@@ -3326,98 +3326,6 @@
           <a:chExt cx="0" cy="0"/>
         </a:xfrm>
       </p:grpSpPr>
-      <p:cxnSp>
-        <p:nvCxnSpPr>
-          <p:cNvPr id="101" name="Elbow Connector 100">
-            <a:extLst>
-              <a:ext uri="{FF2B5EF4-FFF2-40B4-BE49-F238E27FC236}">
-                <a16:creationId xmlns:a16="http://schemas.microsoft.com/office/drawing/2014/main" id="{5756822D-F2C9-CD62-4914-55DCD987551F}"/>
-              </a:ext>
-            </a:extLst>
-          </p:cNvPr>
-          <p:cNvCxnSpPr>
-            <a:cxnSpLocks/>
-            <a:stCxn id="92" idx="3"/>
-          </p:cNvCxnSpPr>
-          <p:nvPr/>
-        </p:nvCxnSpPr>
-        <p:spPr>
-          <a:xfrm flipV="1">
-            <a:off x="3820657" y="1820569"/>
-            <a:ext cx="3263343" cy="1518808"/>
-          </a:xfrm>
-          <a:prstGeom prst="bentConnector3">
-            <a:avLst/>
-          </a:prstGeom>
-          <a:ln w="28575">
-            <a:solidFill>
-              <a:schemeClr val="tx1"/>
-            </a:solidFill>
-            <a:tailEnd type="triangle"/>
-          </a:ln>
-        </p:spPr>
-        <p:style>
-          <a:lnRef idx="2">
-            <a:schemeClr val="accent1"/>
-          </a:lnRef>
-          <a:fillRef idx="0">
-            <a:schemeClr val="accent1"/>
-          </a:fillRef>
-          <a:effectRef idx="1">
-            <a:schemeClr val="accent1"/>
-          </a:effectRef>
-          <a:fontRef idx="minor">
-            <a:schemeClr val="tx1"/>
-          </a:fontRef>
-        </p:style>
-      </p:cxnSp>
-      <p:cxnSp>
-        <p:nvCxnSpPr>
-          <p:cNvPr id="102" name="Elbow Connector 101">
-            <a:extLst>
-              <a:ext uri="{FF2B5EF4-FFF2-40B4-BE49-F238E27FC236}">
-                <a16:creationId xmlns:a16="http://schemas.microsoft.com/office/drawing/2014/main" id="{EE176197-149A-6500-7454-980541F304C0}"/>
-              </a:ext>
-            </a:extLst>
-          </p:cNvPr>
-          <p:cNvCxnSpPr>
-            <a:cxnSpLocks/>
-            <a:stCxn id="92" idx="3"/>
-          </p:cNvCxnSpPr>
-          <p:nvPr/>
-        </p:nvCxnSpPr>
-        <p:spPr>
-          <a:xfrm>
-            <a:off x="3820657" y="3339377"/>
-            <a:ext cx="3257510" cy="1765642"/>
-          </a:xfrm>
-          <a:prstGeom prst="bentConnector3">
-            <a:avLst>
-              <a:gd name="adj1" fmla="val 50000"/>
-            </a:avLst>
-          </a:prstGeom>
-          <a:ln w="28575">
-            <a:solidFill>
-              <a:schemeClr val="tx1"/>
-            </a:solidFill>
-            <a:tailEnd type="triangle"/>
-          </a:ln>
-        </p:spPr>
-        <p:style>
-          <a:lnRef idx="2">
-            <a:schemeClr val="accent1"/>
-          </a:lnRef>
-          <a:fillRef idx="0">
-            <a:schemeClr val="accent1"/>
-          </a:fillRef>
-          <a:effectRef idx="1">
-            <a:schemeClr val="accent1"/>
-          </a:effectRef>
-          <a:fontRef idx="minor">
-            <a:schemeClr val="tx1"/>
-          </a:fontRef>
-        </p:style>
-      </p:cxnSp>
       <p:sp>
         <p:nvSpPr>
           <p:cNvPr id="133" name="TextBox 132">
@@ -3432,7 +3340,7 @@
         </p:nvSpPr>
         <p:spPr>
           <a:xfrm>
-            <a:off x="469619" y="1730013"/>
+            <a:off x="1032237" y="3701444"/>
             <a:ext cx="3429708" cy="461665"/>
           </a:xfrm>
           <a:prstGeom prst="rect">
@@ -3470,7 +3378,7 @@
         </p:nvSpPr>
         <p:spPr>
           <a:xfrm>
-            <a:off x="7048828" y="218526"/>
+            <a:off x="7559191" y="463076"/>
             <a:ext cx="3429708" cy="461665"/>
           </a:xfrm>
           <a:prstGeom prst="rect">
@@ -3508,7 +3416,7 @@
         </p:nvSpPr>
         <p:spPr>
           <a:xfrm>
-            <a:off x="7048828" y="3488094"/>
+            <a:off x="7559191" y="3732644"/>
             <a:ext cx="3429708" cy="461665"/>
           </a:xfrm>
           <a:prstGeom prst="rect">
@@ -3546,7 +3454,7 @@
         </p:nvSpPr>
         <p:spPr>
           <a:xfrm>
-            <a:off x="7558886" y="2954561"/>
+            <a:off x="8069249" y="3199111"/>
             <a:ext cx="1393853" cy="307777"/>
           </a:xfrm>
           <a:prstGeom prst="rect">
@@ -3585,7 +3493,7 @@
         </p:nvCxnSpPr>
         <p:spPr>
           <a:xfrm>
-            <a:off x="7080282" y="3104351"/>
+            <a:off x="7590645" y="3348901"/>
             <a:ext cx="478604" cy="0"/>
           </a:xfrm>
           <a:prstGeom prst="line">
@@ -3629,7 +3537,7 @@
         </p:nvCxnSpPr>
         <p:spPr>
           <a:xfrm>
-            <a:off x="8917934" y="3091297"/>
+            <a:off x="9428297" y="3335847"/>
             <a:ext cx="478604" cy="0"/>
           </a:xfrm>
           <a:prstGeom prst="line">
@@ -3671,7 +3579,7 @@
         </p:nvSpPr>
         <p:spPr>
           <a:xfrm>
-            <a:off x="601957" y="382999"/>
+            <a:off x="716236" y="92594"/>
             <a:ext cx="632002" cy="461665"/>
           </a:xfrm>
           <a:prstGeom prst="rect">
@@ -3709,7 +3617,7 @@
         </p:nvSpPr>
         <p:spPr>
           <a:xfrm>
-            <a:off x="4337524" y="2868815"/>
+            <a:off x="4854791" y="3209396"/>
             <a:ext cx="2232885" cy="941123"/>
           </a:xfrm>
           <a:prstGeom prst="roundRect">
@@ -3783,7 +3691,7 @@
         </p:nvSpPr>
         <p:spPr>
           <a:xfrm>
-            <a:off x="9396538" y="2951230"/>
+            <a:off x="9906901" y="3195780"/>
             <a:ext cx="1393853" cy="307777"/>
           </a:xfrm>
           <a:prstGeom prst="rect">
@@ -3820,7 +3728,7 @@
         </p:nvGrpSpPr>
         <p:grpSpPr>
           <a:xfrm>
-            <a:off x="312278" y="2192927"/>
+            <a:off x="874896" y="4164358"/>
             <a:ext cx="3539316" cy="2294240"/>
             <a:chOff x="312278" y="2192927"/>
             <a:chExt cx="3539316" cy="2294240"/>
@@ -4725,7 +4633,7 @@
         </p:nvSpPr>
         <p:spPr>
           <a:xfrm>
-            <a:off x="7073559" y="644606"/>
+            <a:off x="7583922" y="889156"/>
             <a:ext cx="3429709" cy="2292899"/>
           </a:xfrm>
           <a:prstGeom prst="rect">
@@ -4779,7 +4687,7 @@
         </p:nvSpPr>
         <p:spPr>
           <a:xfrm rot="583769">
-            <a:off x="7078622" y="982702"/>
+            <a:off x="7588985" y="1227252"/>
             <a:ext cx="3455583" cy="230455"/>
           </a:xfrm>
           <a:custGeom>
@@ -4931,7 +4839,7 @@
         </p:nvSpPr>
         <p:spPr>
           <a:xfrm rot="583769">
-            <a:off x="7060400" y="1659697"/>
+            <a:off x="7570763" y="1904247"/>
             <a:ext cx="3455583" cy="140994"/>
           </a:xfrm>
           <a:custGeom>
@@ -5070,331 +4978,6 @@
       </p:sp>
       <p:sp>
         <p:nvSpPr>
-          <p:cNvPr id="21" name="Oval 20">
-            <a:extLst>
-              <a:ext uri="{FF2B5EF4-FFF2-40B4-BE49-F238E27FC236}">
-                <a16:creationId xmlns:a16="http://schemas.microsoft.com/office/drawing/2014/main" id="{40458DF2-62CB-CE83-3BFB-1086F7515349}"/>
-              </a:ext>
-            </a:extLst>
-          </p:cNvPr>
-          <p:cNvSpPr/>
-          <p:nvPr/>
-        </p:nvSpPr>
-        <p:spPr>
-          <a:xfrm>
-            <a:off x="7152230" y="2030781"/>
-            <a:ext cx="1216668" cy="124547"/>
-          </a:xfrm>
-          <a:custGeom>
-            <a:avLst/>
-            <a:gdLst>
-              <a:gd name="csX0" fmla="*/ 0 w 1216668"/>
-              <a:gd name="csY0" fmla="*/ 62274 h 124547"/>
-              <a:gd name="csX1" fmla="*/ 608334 w 1216668"/>
-              <a:gd name="csY1" fmla="*/ 0 h 124547"/>
-              <a:gd name="csX2" fmla="*/ 1216668 w 1216668"/>
-              <a:gd name="csY2" fmla="*/ 62274 h 124547"/>
-              <a:gd name="csX3" fmla="*/ 608334 w 1216668"/>
-              <a:gd name="csY3" fmla="*/ 124548 h 124547"/>
-              <a:gd name="csX4" fmla="*/ 0 w 1216668"/>
-              <a:gd name="csY4" fmla="*/ 62274 h 124547"/>
-            </a:gdLst>
-            <a:ahLst/>
-            <a:cxnLst>
-              <a:cxn ang="0">
-                <a:pos x="csX0" y="csY0"/>
-              </a:cxn>
-              <a:cxn ang="0">
-                <a:pos x="csX1" y="csY1"/>
-              </a:cxn>
-              <a:cxn ang="0">
-                <a:pos x="csX2" y="csY2"/>
-              </a:cxn>
-              <a:cxn ang="0">
-                <a:pos x="csX3" y="csY3"/>
-              </a:cxn>
-              <a:cxn ang="0">
-                <a:pos x="csX4" y="csY4"/>
-              </a:cxn>
-            </a:cxnLst>
-            <a:rect l="l" t="t" r="r" b="b"/>
-            <a:pathLst>
-              <a:path w="1216668" h="124547" fill="none" extrusionOk="0">
-                <a:moveTo>
-                  <a:pt x="0" y="62274"/>
-                </a:moveTo>
-                <a:cubicBezTo>
-                  <a:pt x="69609" y="36139"/>
-                  <a:pt x="283941" y="-23834"/>
-                  <a:pt x="608334" y="0"/>
-                </a:cubicBezTo>
-                <a:cubicBezTo>
-                  <a:pt x="942198" y="-323"/>
-                  <a:pt x="1210380" y="33802"/>
-                  <a:pt x="1216668" y="62274"/>
-                </a:cubicBezTo>
-                <a:cubicBezTo>
-                  <a:pt x="1210321" y="36137"/>
-                  <a:pt x="897461" y="189653"/>
-                  <a:pt x="608334" y="124548"/>
-                </a:cubicBezTo>
-                <a:cubicBezTo>
-                  <a:pt x="280563" y="129141"/>
-                  <a:pt x="4593" y="97771"/>
-                  <a:pt x="0" y="62274"/>
-                </a:cubicBezTo>
-                <a:close/>
-              </a:path>
-              <a:path w="1216668" h="124547" stroke="0" extrusionOk="0">
-                <a:moveTo>
-                  <a:pt x="0" y="62274"/>
-                </a:moveTo>
-                <a:cubicBezTo>
-                  <a:pt x="-63163" y="-11080"/>
-                  <a:pt x="241817" y="11463"/>
-                  <a:pt x="608334" y="0"/>
-                </a:cubicBezTo>
-                <a:cubicBezTo>
-                  <a:pt x="948882" y="963"/>
-                  <a:pt x="1213890" y="27969"/>
-                  <a:pt x="1216668" y="62274"/>
-                </a:cubicBezTo>
-                <a:cubicBezTo>
-                  <a:pt x="1184160" y="128413"/>
-                  <a:pt x="936241" y="169138"/>
-                  <a:pt x="608334" y="124548"/>
-                </a:cubicBezTo>
-                <a:cubicBezTo>
-                  <a:pt x="266206" y="121181"/>
-                  <a:pt x="2457" y="97841"/>
-                  <a:pt x="0" y="62274"/>
-                </a:cubicBezTo>
-                <a:close/>
-              </a:path>
-            </a:pathLst>
-          </a:custGeom>
-          <a:pattFill prst="dkUpDiag">
-            <a:fgClr>
-              <a:schemeClr val="accent1">
-                <a:lumMod val="20000"/>
-                <a:lumOff val="80000"/>
-              </a:schemeClr>
-            </a:fgClr>
-            <a:bgClr>
-              <a:schemeClr val="bg1"/>
-            </a:bgClr>
-          </a:pattFill>
-          <a:ln>
-            <a:solidFill>
-              <a:schemeClr val="accent1">
-                <a:lumMod val="60000"/>
-                <a:lumOff val="40000"/>
-              </a:schemeClr>
-            </a:solidFill>
-            <a:extLst>
-              <a:ext uri="{C807C97D-BFC1-408E-A445-0C87EB9F89A2}">
-                <ask:lineSketchStyleProps xmlns:ask="http://schemas.microsoft.com/office/drawing/2018/sketchyshapes" sd="1219033472">
-                  <a:prstGeom prst="ellipse">
-                    <a:avLst/>
-                  </a:prstGeom>
-                  <ask:type>
-                    <ask:lineSketchScribble/>
-                  </ask:type>
-                </ask:lineSketchStyleProps>
-              </a:ext>
-            </a:extLst>
-          </a:ln>
-        </p:spPr>
-        <p:style>
-          <a:lnRef idx="2">
-            <a:schemeClr val="accent1">
-              <a:shade val="15000"/>
-            </a:schemeClr>
-          </a:lnRef>
-          <a:fillRef idx="1">
-            <a:schemeClr val="accent1"/>
-          </a:fillRef>
-          <a:effectRef idx="0">
-            <a:schemeClr val="accent1"/>
-          </a:effectRef>
-          <a:fontRef idx="minor">
-            <a:schemeClr val="lt1"/>
-          </a:fontRef>
-        </p:style>
-        <p:txBody>
-          <a:bodyPr rtlCol="0" anchor="ctr"/>
-          <a:lstStyle/>
-          <a:p>
-            <a:pPr algn="ctr"/>
-            <a:endParaRPr lang="en-US"/>
-          </a:p>
-        </p:txBody>
-      </p:sp>
-      <p:sp>
-        <p:nvSpPr>
-          <p:cNvPr id="24" name="Oval 23">
-            <a:extLst>
-              <a:ext uri="{FF2B5EF4-FFF2-40B4-BE49-F238E27FC236}">
-                <a16:creationId xmlns:a16="http://schemas.microsoft.com/office/drawing/2014/main" id="{2FB46EE4-C9A2-FAFC-67CB-361259FFBBDF}"/>
-              </a:ext>
-            </a:extLst>
-          </p:cNvPr>
-          <p:cNvSpPr/>
-          <p:nvPr/>
-        </p:nvSpPr>
-        <p:spPr>
-          <a:xfrm>
-            <a:off x="9107579" y="2302425"/>
-            <a:ext cx="1216663" cy="128248"/>
-          </a:xfrm>
-          <a:custGeom>
-            <a:avLst/>
-            <a:gdLst>
-              <a:gd name="csX0" fmla="*/ 0 w 1216663"/>
-              <a:gd name="csY0" fmla="*/ 64124 h 128248"/>
-              <a:gd name="csX1" fmla="*/ 608332 w 1216663"/>
-              <a:gd name="csY1" fmla="*/ 0 h 128248"/>
-              <a:gd name="csX2" fmla="*/ 1216664 w 1216663"/>
-              <a:gd name="csY2" fmla="*/ 64124 h 128248"/>
-              <a:gd name="csX3" fmla="*/ 608332 w 1216663"/>
-              <a:gd name="csY3" fmla="*/ 128248 h 128248"/>
-              <a:gd name="csX4" fmla="*/ 0 w 1216663"/>
-              <a:gd name="csY4" fmla="*/ 64124 h 128248"/>
-            </a:gdLst>
-            <a:ahLst/>
-            <a:cxnLst>
-              <a:cxn ang="0">
-                <a:pos x="csX0" y="csY0"/>
-              </a:cxn>
-              <a:cxn ang="0">
-                <a:pos x="csX1" y="csY1"/>
-              </a:cxn>
-              <a:cxn ang="0">
-                <a:pos x="csX2" y="csY2"/>
-              </a:cxn>
-              <a:cxn ang="0">
-                <a:pos x="csX3" y="csY3"/>
-              </a:cxn>
-              <a:cxn ang="0">
-                <a:pos x="csX4" y="csY4"/>
-              </a:cxn>
-            </a:cxnLst>
-            <a:rect l="l" t="t" r="r" b="b"/>
-            <a:pathLst>
-              <a:path w="1216663" h="128248" fill="none" extrusionOk="0">
-                <a:moveTo>
-                  <a:pt x="0" y="64124"/>
-                </a:moveTo>
-                <a:cubicBezTo>
-                  <a:pt x="33571" y="32692"/>
-                  <a:pt x="283495" y="-22915"/>
-                  <a:pt x="608332" y="0"/>
-                </a:cubicBezTo>
-                <a:cubicBezTo>
-                  <a:pt x="937376" y="-1061"/>
-                  <a:pt x="1213975" y="31241"/>
-                  <a:pt x="1216664" y="64124"/>
-                </a:cubicBezTo>
-                <a:cubicBezTo>
-                  <a:pt x="1215038" y="84030"/>
-                  <a:pt x="930887" y="146893"/>
-                  <a:pt x="608332" y="128248"/>
-                </a:cubicBezTo>
-                <a:cubicBezTo>
-                  <a:pt x="274924" y="129683"/>
-                  <a:pt x="1346" y="99863"/>
-                  <a:pt x="0" y="64124"/>
-                </a:cubicBezTo>
-                <a:close/>
-              </a:path>
-              <a:path w="1216663" h="128248" stroke="0" extrusionOk="0">
-                <a:moveTo>
-                  <a:pt x="0" y="64124"/>
-                </a:moveTo>
-                <a:cubicBezTo>
-                  <a:pt x="-29864" y="10288"/>
-                  <a:pt x="234528" y="14199"/>
-                  <a:pt x="608332" y="0"/>
-                </a:cubicBezTo>
-                <a:cubicBezTo>
-                  <a:pt x="945248" y="199"/>
-                  <a:pt x="1209506" y="28937"/>
-                  <a:pt x="1216664" y="64124"/>
-                </a:cubicBezTo>
-                <a:cubicBezTo>
-                  <a:pt x="1188848" y="126703"/>
-                  <a:pt x="938501" y="160322"/>
-                  <a:pt x="608332" y="128248"/>
-                </a:cubicBezTo>
-                <a:cubicBezTo>
-                  <a:pt x="267581" y="125633"/>
-                  <a:pt x="1784" y="100391"/>
-                  <a:pt x="0" y="64124"/>
-                </a:cubicBezTo>
-                <a:close/>
-              </a:path>
-            </a:pathLst>
-          </a:custGeom>
-          <a:pattFill prst="dkUpDiag">
-            <a:fgClr>
-              <a:schemeClr val="accent1">
-                <a:lumMod val="20000"/>
-                <a:lumOff val="80000"/>
-              </a:schemeClr>
-            </a:fgClr>
-            <a:bgClr>
-              <a:schemeClr val="bg1"/>
-            </a:bgClr>
-          </a:pattFill>
-          <a:ln cmpd="sng">
-            <a:solidFill>
-              <a:schemeClr val="accent1">
-                <a:lumMod val="60000"/>
-                <a:lumOff val="40000"/>
-              </a:schemeClr>
-            </a:solidFill>
-            <a:miter lim="800000"/>
-            <a:extLst>
-              <a:ext uri="{C807C97D-BFC1-408E-A445-0C87EB9F89A2}">
-                <ask:lineSketchStyleProps xmlns:ask="http://schemas.microsoft.com/office/drawing/2018/sketchyshapes" sd="1219033472">
-                  <a:prstGeom prst="ellipse">
-                    <a:avLst/>
-                  </a:prstGeom>
-                  <ask:type>
-                    <ask:lineSketchFreehand/>
-                  </ask:type>
-                </ask:lineSketchStyleProps>
-              </a:ext>
-            </a:extLst>
-          </a:ln>
-        </p:spPr>
-        <p:style>
-          <a:lnRef idx="2">
-            <a:schemeClr val="accent1">
-              <a:shade val="15000"/>
-            </a:schemeClr>
-          </a:lnRef>
-          <a:fillRef idx="1">
-            <a:schemeClr val="accent1"/>
-          </a:fillRef>
-          <a:effectRef idx="0">
-            <a:schemeClr val="accent1"/>
-          </a:effectRef>
-          <a:fontRef idx="minor">
-            <a:schemeClr val="lt1"/>
-          </a:fontRef>
-        </p:style>
-        <p:txBody>
-          <a:bodyPr rtlCol="0" anchor="ctr"/>
-          <a:lstStyle/>
-          <a:p>
-            <a:pPr algn="ctr"/>
-            <a:endParaRPr lang="en-US"/>
-          </a:p>
-        </p:txBody>
-      </p:sp>
-      <p:sp>
-        <p:nvSpPr>
           <p:cNvPr id="27" name="Freeform 26">
             <a:extLst>
               <a:ext uri="{FF2B5EF4-FFF2-40B4-BE49-F238E27FC236}">
@@ -5407,7 +4990,7 @@
         </p:nvSpPr>
         <p:spPr>
           <a:xfrm rot="583769">
-            <a:off x="7060400" y="1941335"/>
+            <a:off x="7570763" y="2185885"/>
             <a:ext cx="3455583" cy="140994"/>
           </a:xfrm>
           <a:custGeom>
@@ -5562,7 +5145,7 @@
         </p:nvCxnSpPr>
         <p:spPr>
           <a:xfrm>
-            <a:off x="8796758" y="1774608"/>
+            <a:off x="9307121" y="2019158"/>
             <a:ext cx="0" cy="281638"/>
           </a:xfrm>
           <a:prstGeom prst="straightConnector1">
@@ -5608,7 +5191,7 @@
         </p:nvCxnSpPr>
         <p:spPr>
           <a:xfrm>
-            <a:off x="7589683" y="1453315"/>
+            <a:off x="8100046" y="1697865"/>
             <a:ext cx="0" cy="281638"/>
           </a:xfrm>
           <a:prstGeom prst="straightConnector1">
@@ -5652,7 +5235,7 @@
         </p:nvCxnSpPr>
         <p:spPr>
           <a:xfrm>
-            <a:off x="9837349" y="1929571"/>
+            <a:off x="10347712" y="2174121"/>
             <a:ext cx="2390" cy="266977"/>
           </a:xfrm>
           <a:prstGeom prst="straightConnector1">
@@ -5694,7 +5277,7 @@
         </p:nvSpPr>
         <p:spPr>
           <a:xfrm>
-            <a:off x="7754868" y="1109854"/>
+            <a:off x="8265231" y="1354404"/>
             <a:ext cx="2326132" cy="523220"/>
           </a:xfrm>
           <a:prstGeom prst="rect">
@@ -5739,7 +5322,7 @@
         </p:nvSpPr>
         <p:spPr>
           <a:xfrm>
-            <a:off x="7072694" y="3919154"/>
+            <a:off x="7583057" y="4163704"/>
             <a:ext cx="3429709" cy="2292899"/>
           </a:xfrm>
           <a:prstGeom prst="rect">
@@ -5793,7 +5376,7 @@
         </p:nvSpPr>
         <p:spPr>
           <a:xfrm rot="583769">
-            <a:off x="7077757" y="4257250"/>
+            <a:off x="7588120" y="4501800"/>
             <a:ext cx="3455583" cy="230455"/>
           </a:xfrm>
           <a:custGeom>
@@ -5946,7 +5529,7 @@
         </p:nvSpPr>
         <p:spPr>
           <a:xfrm rot="583769">
-            <a:off x="7059535" y="4934245"/>
+            <a:off x="7569898" y="5178795"/>
             <a:ext cx="3455583" cy="140994"/>
           </a:xfrm>
           <a:custGeom>
@@ -6097,7 +5680,7 @@
         </p:nvSpPr>
         <p:spPr>
           <a:xfrm rot="583769">
-            <a:off x="7077758" y="967516"/>
+            <a:off x="7588121" y="1212066"/>
             <a:ext cx="3455583" cy="230455"/>
           </a:xfrm>
           <a:custGeom>
@@ -6250,7 +5833,7 @@
         </p:nvSpPr>
         <p:spPr>
           <a:xfrm rot="583769">
-            <a:off x="8389230" y="5451876"/>
+            <a:off x="8899593" y="5696426"/>
             <a:ext cx="1186573" cy="642912"/>
           </a:xfrm>
           <a:custGeom>
@@ -6487,7 +6070,7 @@
         </p:nvSpPr>
         <p:spPr>
           <a:xfrm rot="583769">
-            <a:off x="10336818" y="5890313"/>
+            <a:off x="10847181" y="6134863"/>
             <a:ext cx="130645" cy="309477"/>
           </a:xfrm>
           <a:custGeom>
@@ -6714,7 +6297,7 @@
         </p:nvSpPr>
         <p:spPr>
           <a:xfrm>
-            <a:off x="9409484" y="5092160"/>
+            <a:off x="9919847" y="5336710"/>
             <a:ext cx="868721" cy="207555"/>
           </a:xfrm>
           <a:custGeom>
@@ -7084,7 +6667,7 @@
         </p:nvSpPr>
         <p:spPr>
           <a:xfrm>
-            <a:off x="7152230" y="5026544"/>
+            <a:off x="7662593" y="5271094"/>
             <a:ext cx="1216668" cy="124547"/>
           </a:xfrm>
           <a:custGeom>
@@ -7121,33 +6704,7 @@
             </a:cxnLst>
             <a:rect l="l" t="t" r="r" b="b"/>
             <a:pathLst>
-              <a:path w="1216668" h="124547" fill="none" extrusionOk="0">
-                <a:moveTo>
-                  <a:pt x="0" y="62274"/>
-                </a:moveTo>
-                <a:cubicBezTo>
-                  <a:pt x="69609" y="36139"/>
-                  <a:pt x="283941" y="-23834"/>
-                  <a:pt x="608334" y="0"/>
-                </a:cubicBezTo>
-                <a:cubicBezTo>
-                  <a:pt x="942198" y="-323"/>
-                  <a:pt x="1210380" y="33802"/>
-                  <a:pt x="1216668" y="62274"/>
-                </a:cubicBezTo>
-                <a:cubicBezTo>
-                  <a:pt x="1210321" y="36137"/>
-                  <a:pt x="897461" y="189653"/>
-                  <a:pt x="608334" y="124548"/>
-                </a:cubicBezTo>
-                <a:cubicBezTo>
-                  <a:pt x="280563" y="129141"/>
-                  <a:pt x="4593" y="97771"/>
-                  <a:pt x="0" y="62274"/>
-                </a:cubicBezTo>
-                <a:close/>
-              </a:path>
-              <a:path w="1216668" h="124547" stroke="0" extrusionOk="0">
+              <a:path w="1216668" h="124547" extrusionOk="0">
                 <a:moveTo>
                   <a:pt x="0" y="62274"/>
                 </a:moveTo>
@@ -7237,7 +6794,7 @@
         </p:nvSpPr>
         <p:spPr>
           <a:xfrm>
-            <a:off x="9229017" y="5360311"/>
+            <a:off x="9739380" y="5604861"/>
             <a:ext cx="1216663" cy="128248"/>
           </a:xfrm>
           <a:custGeom>
@@ -7274,33 +6831,7 @@
             </a:cxnLst>
             <a:rect l="l" t="t" r="r" b="b"/>
             <a:pathLst>
-              <a:path w="1216663" h="128248" fill="none" extrusionOk="0">
-                <a:moveTo>
-                  <a:pt x="0" y="64124"/>
-                </a:moveTo>
-                <a:cubicBezTo>
-                  <a:pt x="33571" y="32692"/>
-                  <a:pt x="283495" y="-22915"/>
-                  <a:pt x="608332" y="0"/>
-                </a:cubicBezTo>
-                <a:cubicBezTo>
-                  <a:pt x="937376" y="-1061"/>
-                  <a:pt x="1213975" y="31241"/>
-                  <a:pt x="1216664" y="64124"/>
-                </a:cubicBezTo>
-                <a:cubicBezTo>
-                  <a:pt x="1215038" y="84030"/>
-                  <a:pt x="930887" y="146893"/>
-                  <a:pt x="608332" y="128248"/>
-                </a:cubicBezTo>
-                <a:cubicBezTo>
-                  <a:pt x="274924" y="129683"/>
-                  <a:pt x="1346" y="99863"/>
-                  <a:pt x="0" y="64124"/>
-                </a:cubicBezTo>
-                <a:close/>
-              </a:path>
-              <a:path w="1216663" h="128248" stroke="0" extrusionOk="0">
+              <a:path w="1216663" h="128248" extrusionOk="0">
                 <a:moveTo>
                   <a:pt x="0" y="64124"/>
                 </a:moveTo>
@@ -7391,7 +6922,7 @@
         </p:nvSpPr>
         <p:spPr>
           <a:xfrm rot="583769">
-            <a:off x="7020468" y="4277925"/>
+            <a:off x="7530831" y="4522475"/>
             <a:ext cx="3500371" cy="881393"/>
           </a:xfrm>
           <a:custGeom>
@@ -8011,7 +7542,7 @@
         </p:nvSpPr>
         <p:spPr>
           <a:xfrm rot="1583516">
-            <a:off x="7502241" y="4366500"/>
+            <a:off x="8012604" y="4611050"/>
             <a:ext cx="429911" cy="215649"/>
           </a:xfrm>
           <a:custGeom>
@@ -8362,7 +7893,7 @@
         </p:nvSpPr>
         <p:spPr>
           <a:xfrm rot="583769">
-            <a:off x="7064720" y="5261997"/>
+            <a:off x="7575083" y="5506547"/>
             <a:ext cx="1743741" cy="112828"/>
           </a:xfrm>
           <a:custGeom>
@@ -8535,7 +8066,7 @@
         </p:nvCxnSpPr>
         <p:spPr>
           <a:xfrm>
-            <a:off x="8794368" y="5056712"/>
+            <a:off x="9304731" y="5301262"/>
             <a:ext cx="0" cy="436493"/>
           </a:xfrm>
           <a:prstGeom prst="straightConnector1">
@@ -8579,7 +8110,7 @@
         </p:nvCxnSpPr>
         <p:spPr>
           <a:xfrm>
-            <a:off x="7767324" y="4810080"/>
+            <a:off x="8277687" y="5054630"/>
             <a:ext cx="0" cy="432927"/>
           </a:xfrm>
           <a:prstGeom prst="straightConnector1">
@@ -8621,7 +8152,7 @@
         </p:nvSpPr>
         <p:spPr>
           <a:xfrm>
-            <a:off x="7018625" y="4152612"/>
+            <a:off x="7528988" y="4397162"/>
             <a:ext cx="671580" cy="523220"/>
           </a:xfrm>
           <a:prstGeom prst="rect">
@@ -8658,7 +8189,7 @@
         </p:nvSpPr>
         <p:spPr>
           <a:xfrm>
-            <a:off x="9363905" y="4687793"/>
+            <a:off x="9874268" y="4932343"/>
             <a:ext cx="966299" cy="307777"/>
           </a:xfrm>
           <a:prstGeom prst="rect">
@@ -8695,7 +8226,7 @@
         </p:nvSpPr>
         <p:spPr>
           <a:xfrm>
-            <a:off x="8626207" y="3903194"/>
+            <a:off x="9136570" y="4147744"/>
             <a:ext cx="1900939" cy="523220"/>
           </a:xfrm>
           <a:prstGeom prst="rect">
@@ -8733,7 +8264,7 @@
         </p:nvSpPr>
         <p:spPr>
           <a:xfrm>
-            <a:off x="9479579" y="5621428"/>
+            <a:off x="9989942" y="5865978"/>
             <a:ext cx="527958" cy="307777"/>
           </a:xfrm>
           <a:prstGeom prst="rect">
@@ -8770,7 +8301,7 @@
         </p:nvSpPr>
         <p:spPr>
           <a:xfrm>
-            <a:off x="7211530" y="5500518"/>
+            <a:off x="7721893" y="5745068"/>
             <a:ext cx="1573805" cy="523220"/>
           </a:xfrm>
           <a:prstGeom prst="rect">
@@ -8809,7 +8340,7 @@
         </p:nvCxnSpPr>
         <p:spPr>
           <a:xfrm>
-            <a:off x="10103949" y="5318411"/>
+            <a:off x="10614312" y="5562961"/>
             <a:ext cx="3874" cy="872017"/>
           </a:xfrm>
           <a:prstGeom prst="straightConnector1">
@@ -8820,6 +8351,840 @@
               <a:srgbClr val="C00000"/>
             </a:solidFill>
             <a:tailEnd type="triangle"/>
+          </a:ln>
+        </p:spPr>
+        <p:style>
+          <a:lnRef idx="2">
+            <a:schemeClr val="accent1"/>
+          </a:lnRef>
+          <a:fillRef idx="0">
+            <a:schemeClr val="accent1"/>
+          </a:fillRef>
+          <a:effectRef idx="1">
+            <a:schemeClr val="accent1"/>
+          </a:effectRef>
+          <a:fontRef idx="minor">
+            <a:schemeClr val="tx1"/>
+          </a:fontRef>
+        </p:style>
+      </p:cxnSp>
+      <p:cxnSp>
+        <p:nvCxnSpPr>
+          <p:cNvPr id="9" name="Straight Arrow Connector 8">
+            <a:extLst>
+              <a:ext uri="{FF2B5EF4-FFF2-40B4-BE49-F238E27FC236}">
+                <a16:creationId xmlns:a16="http://schemas.microsoft.com/office/drawing/2014/main" id="{5E902ABE-82FD-B585-7E0A-64A930F41A8C}"/>
+              </a:ext>
+            </a:extLst>
+          </p:cNvPr>
+          <p:cNvCxnSpPr>
+            <a:stCxn id="92" idx="3"/>
+            <a:endCxn id="48" idx="1"/>
+          </p:cNvCxnSpPr>
+          <p:nvPr/>
+        </p:nvCxnSpPr>
+        <p:spPr>
+          <a:xfrm flipV="1">
+            <a:off x="4383275" y="5310154"/>
+            <a:ext cx="3199782" cy="654"/>
+          </a:xfrm>
+          <a:prstGeom prst="straightConnector1">
+            <a:avLst/>
+          </a:prstGeom>
+          <a:ln w="28575">
+            <a:solidFill>
+              <a:schemeClr val="tx1"/>
+            </a:solidFill>
+            <a:tailEnd type="triangle"/>
+          </a:ln>
+        </p:spPr>
+        <p:style>
+          <a:lnRef idx="2">
+            <a:schemeClr val="accent1"/>
+          </a:lnRef>
+          <a:fillRef idx="0">
+            <a:schemeClr val="accent1"/>
+          </a:fillRef>
+          <a:effectRef idx="1">
+            <a:schemeClr val="accent1"/>
+          </a:effectRef>
+          <a:fontRef idx="minor">
+            <a:schemeClr val="tx1"/>
+          </a:fontRef>
+        </p:style>
+      </p:cxnSp>
+      <p:sp>
+        <p:nvSpPr>
+          <p:cNvPr id="10" name="TextBox 9">
+            <a:extLst>
+              <a:ext uri="{FF2B5EF4-FFF2-40B4-BE49-F238E27FC236}">
+                <a16:creationId xmlns:a16="http://schemas.microsoft.com/office/drawing/2014/main" id="{09315726-9EF6-A88B-CE98-7B0794455928}"/>
+              </a:ext>
+            </a:extLst>
+          </p:cNvPr>
+          <p:cNvSpPr txBox="1"/>
+          <p:nvPr/>
+        </p:nvSpPr>
+        <p:spPr>
+          <a:xfrm>
+            <a:off x="1032237" y="419768"/>
+            <a:ext cx="3429708" cy="461665"/>
+          </a:xfrm>
+          <a:prstGeom prst="rect">
+            <a:avLst/>
+          </a:prstGeom>
+          <a:noFill/>
+        </p:spPr>
+        <p:txBody>
+          <a:bodyPr wrap="square" rtlCol="0" anchor="ctr">
+            <a:spAutoFit/>
+          </a:bodyPr>
+          <a:lstStyle/>
+          <a:p>
+            <a:pPr algn="ctr"/>
+            <a:r>
+              <a:rPr lang="en-US" sz="2400" dirty="0">
+                <a:latin typeface=""/>
+              </a:rPr>
+              <a:t>Ice-poor permafrost</a:t>
+            </a:r>
+          </a:p>
+        </p:txBody>
+      </p:sp>
+      <p:grpSp>
+        <p:nvGrpSpPr>
+          <p:cNvPr id="41" name="Group 40">
+            <a:extLst>
+              <a:ext uri="{FF2B5EF4-FFF2-40B4-BE49-F238E27FC236}">
+                <a16:creationId xmlns:a16="http://schemas.microsoft.com/office/drawing/2014/main" id="{A12D849E-9284-8492-B868-217121FDC2D6}"/>
+              </a:ext>
+            </a:extLst>
+          </p:cNvPr>
+          <p:cNvGrpSpPr/>
+          <p:nvPr/>
+        </p:nvGrpSpPr>
+        <p:grpSpPr>
+          <a:xfrm>
+            <a:off x="940407" y="882682"/>
+            <a:ext cx="3473805" cy="2292899"/>
+            <a:chOff x="430044" y="638132"/>
+            <a:chExt cx="3473805" cy="2292899"/>
+          </a:xfrm>
+        </p:grpSpPr>
+        <p:sp>
+          <p:nvSpPr>
+            <p:cNvPr id="13" name="Rectangle 12">
+              <a:extLst>
+                <a:ext uri="{FF2B5EF4-FFF2-40B4-BE49-F238E27FC236}">
+                  <a16:creationId xmlns:a16="http://schemas.microsoft.com/office/drawing/2014/main" id="{1854E152-129F-E07C-B110-459582C09716}"/>
+                </a:ext>
+              </a:extLst>
+            </p:cNvPr>
+            <p:cNvSpPr/>
+            <p:nvPr/>
+          </p:nvSpPr>
+          <p:spPr>
+            <a:xfrm>
+              <a:off x="443203" y="638132"/>
+              <a:ext cx="3429709" cy="2292899"/>
+            </a:xfrm>
+            <a:prstGeom prst="rect">
+              <a:avLst/>
+            </a:prstGeom>
+            <a:solidFill>
+              <a:schemeClr val="bg1"/>
+            </a:solidFill>
+            <a:ln>
+              <a:solidFill>
+                <a:schemeClr val="tx1"/>
+              </a:solidFill>
+            </a:ln>
+          </p:spPr>
+          <p:style>
+            <a:lnRef idx="2">
+              <a:schemeClr val="accent1">
+                <a:shade val="15000"/>
+              </a:schemeClr>
+            </a:lnRef>
+            <a:fillRef idx="1">
+              <a:schemeClr val="accent1"/>
+            </a:fillRef>
+            <a:effectRef idx="0">
+              <a:schemeClr val="accent1"/>
+            </a:effectRef>
+            <a:fontRef idx="minor">
+              <a:schemeClr val="lt1"/>
+            </a:fontRef>
+          </p:style>
+          <p:txBody>
+            <a:bodyPr rtlCol="0" anchor="ctr"/>
+            <a:lstStyle/>
+            <a:p>
+              <a:pPr algn="ctr"/>
+              <a:endParaRPr lang="en-US" dirty="0"/>
+            </a:p>
+          </p:txBody>
+        </p:sp>
+        <p:sp>
+          <p:nvSpPr>
+            <p:cNvPr id="18" name="Freeform 17">
+              <a:extLst>
+                <a:ext uri="{FF2B5EF4-FFF2-40B4-BE49-F238E27FC236}">
+                  <a16:creationId xmlns:a16="http://schemas.microsoft.com/office/drawing/2014/main" id="{6A04FCB5-7CBC-365A-42BD-DE2B16352469}"/>
+                </a:ext>
+              </a:extLst>
+            </p:cNvPr>
+            <p:cNvSpPr/>
+            <p:nvPr/>
+          </p:nvSpPr>
+          <p:spPr>
+            <a:xfrm rot="583769">
+              <a:off x="448266" y="976228"/>
+              <a:ext cx="3455583" cy="230455"/>
+            </a:xfrm>
+            <a:custGeom>
+              <a:avLst/>
+              <a:gdLst>
+                <a:gd name="csX0" fmla="*/ 0 w 3455582"/>
+                <a:gd name="csY0" fmla="*/ 212977 h 319302"/>
+                <a:gd name="csX1" fmla="*/ 499730 w 3455582"/>
+                <a:gd name="csY1" fmla="*/ 325 h 319302"/>
+                <a:gd name="csX2" fmla="*/ 978196 w 3455582"/>
+                <a:gd name="csY2" fmla="*/ 255507 h 319302"/>
+                <a:gd name="csX3" fmla="*/ 1371600 w 3455582"/>
+                <a:gd name="csY3" fmla="*/ 10958 h 319302"/>
+                <a:gd name="csX4" fmla="*/ 1743740 w 3455582"/>
+                <a:gd name="csY4" fmla="*/ 255507 h 319302"/>
+                <a:gd name="csX5" fmla="*/ 2126512 w 3455582"/>
+                <a:gd name="csY5" fmla="*/ 32223 h 319302"/>
+                <a:gd name="csX6" fmla="*/ 2562447 w 3455582"/>
+                <a:gd name="csY6" fmla="*/ 298037 h 319302"/>
+                <a:gd name="csX7" fmla="*/ 3051544 w 3455582"/>
+                <a:gd name="csY7" fmla="*/ 64121 h 319302"/>
+                <a:gd name="csX8" fmla="*/ 3455582 w 3455582"/>
+                <a:gd name="csY8" fmla="*/ 319302 h 319302"/>
+              </a:gdLst>
+              <a:ahLst/>
+              <a:cxnLst>
+                <a:cxn ang="0">
+                  <a:pos x="csX0" y="csY0"/>
+                </a:cxn>
+                <a:cxn ang="0">
+                  <a:pos x="csX1" y="csY1"/>
+                </a:cxn>
+                <a:cxn ang="0">
+                  <a:pos x="csX2" y="csY2"/>
+                </a:cxn>
+                <a:cxn ang="0">
+                  <a:pos x="csX3" y="csY3"/>
+                </a:cxn>
+                <a:cxn ang="0">
+                  <a:pos x="csX4" y="csY4"/>
+                </a:cxn>
+                <a:cxn ang="0">
+                  <a:pos x="csX5" y="csY5"/>
+                </a:cxn>
+                <a:cxn ang="0">
+                  <a:pos x="csX6" y="csY6"/>
+                </a:cxn>
+                <a:cxn ang="0">
+                  <a:pos x="csX7" y="csY7"/>
+                </a:cxn>
+                <a:cxn ang="0">
+                  <a:pos x="csX8" y="csY8"/>
+                </a:cxn>
+              </a:cxnLst>
+              <a:rect l="l" t="t" r="r" b="b"/>
+              <a:pathLst>
+                <a:path w="3455582" h="319302">
+                  <a:moveTo>
+                    <a:pt x="0" y="212977"/>
+                  </a:moveTo>
+                  <a:cubicBezTo>
+                    <a:pt x="168348" y="103107"/>
+                    <a:pt x="336697" y="-6763"/>
+                    <a:pt x="499730" y="325"/>
+                  </a:cubicBezTo>
+                  <a:cubicBezTo>
+                    <a:pt x="662763" y="7413"/>
+                    <a:pt x="832884" y="253735"/>
+                    <a:pt x="978196" y="255507"/>
+                  </a:cubicBezTo>
+                  <a:cubicBezTo>
+                    <a:pt x="1123508" y="257279"/>
+                    <a:pt x="1244009" y="10958"/>
+                    <a:pt x="1371600" y="10958"/>
+                  </a:cubicBezTo>
+                  <a:cubicBezTo>
+                    <a:pt x="1499191" y="10958"/>
+                    <a:pt x="1617921" y="251963"/>
+                    <a:pt x="1743740" y="255507"/>
+                  </a:cubicBezTo>
+                  <a:cubicBezTo>
+                    <a:pt x="1869559" y="259051"/>
+                    <a:pt x="1990061" y="25135"/>
+                    <a:pt x="2126512" y="32223"/>
+                  </a:cubicBezTo>
+                  <a:cubicBezTo>
+                    <a:pt x="2262963" y="39311"/>
+                    <a:pt x="2408275" y="292721"/>
+                    <a:pt x="2562447" y="298037"/>
+                  </a:cubicBezTo>
+                  <a:cubicBezTo>
+                    <a:pt x="2716619" y="303353"/>
+                    <a:pt x="2902688" y="60577"/>
+                    <a:pt x="3051544" y="64121"/>
+                  </a:cubicBezTo>
+                  <a:cubicBezTo>
+                    <a:pt x="3200400" y="67665"/>
+                    <a:pt x="3327991" y="193483"/>
+                    <a:pt x="3455582" y="319302"/>
+                  </a:cubicBezTo>
+                </a:path>
+              </a:pathLst>
+            </a:custGeom>
+            <a:noFill/>
+            <a:ln w="28575">
+              <a:solidFill>
+                <a:schemeClr val="accent6">
+                  <a:lumMod val="75000"/>
+                </a:schemeClr>
+              </a:solidFill>
+            </a:ln>
+          </p:spPr>
+          <p:style>
+            <a:lnRef idx="2">
+              <a:schemeClr val="accent1">
+                <a:shade val="15000"/>
+              </a:schemeClr>
+            </a:lnRef>
+            <a:fillRef idx="1">
+              <a:schemeClr val="accent1"/>
+            </a:fillRef>
+            <a:effectRef idx="0">
+              <a:schemeClr val="accent1"/>
+            </a:effectRef>
+            <a:fontRef idx="minor">
+              <a:schemeClr val="lt1"/>
+            </a:fontRef>
+          </p:style>
+          <p:txBody>
+            <a:bodyPr rtlCol="0" anchor="ctr"/>
+            <a:lstStyle/>
+            <a:p>
+              <a:pPr algn="ctr"/>
+              <a:endParaRPr lang="en-US"/>
+            </a:p>
+          </p:txBody>
+        </p:sp>
+        <p:sp>
+          <p:nvSpPr>
+            <p:cNvPr id="19" name="Freeform 18">
+              <a:extLst>
+                <a:ext uri="{FF2B5EF4-FFF2-40B4-BE49-F238E27FC236}">
+                  <a16:creationId xmlns:a16="http://schemas.microsoft.com/office/drawing/2014/main" id="{0488372D-AD3C-B005-8933-497AE6DD96ED}"/>
+                </a:ext>
+              </a:extLst>
+            </p:cNvPr>
+            <p:cNvSpPr/>
+            <p:nvPr/>
+          </p:nvSpPr>
+          <p:spPr>
+            <a:xfrm rot="583769">
+              <a:off x="430044" y="1653223"/>
+              <a:ext cx="3455583" cy="140994"/>
+            </a:xfrm>
+            <a:custGeom>
+              <a:avLst/>
+              <a:gdLst>
+                <a:gd name="csX0" fmla="*/ 0 w 3455582"/>
+                <a:gd name="csY0" fmla="*/ 212977 h 319302"/>
+                <a:gd name="csX1" fmla="*/ 499730 w 3455582"/>
+                <a:gd name="csY1" fmla="*/ 325 h 319302"/>
+                <a:gd name="csX2" fmla="*/ 978196 w 3455582"/>
+                <a:gd name="csY2" fmla="*/ 255507 h 319302"/>
+                <a:gd name="csX3" fmla="*/ 1371600 w 3455582"/>
+                <a:gd name="csY3" fmla="*/ 10958 h 319302"/>
+                <a:gd name="csX4" fmla="*/ 1743740 w 3455582"/>
+                <a:gd name="csY4" fmla="*/ 255507 h 319302"/>
+                <a:gd name="csX5" fmla="*/ 2126512 w 3455582"/>
+                <a:gd name="csY5" fmla="*/ 32223 h 319302"/>
+                <a:gd name="csX6" fmla="*/ 2562447 w 3455582"/>
+                <a:gd name="csY6" fmla="*/ 298037 h 319302"/>
+                <a:gd name="csX7" fmla="*/ 3051544 w 3455582"/>
+                <a:gd name="csY7" fmla="*/ 64121 h 319302"/>
+                <a:gd name="csX8" fmla="*/ 3455582 w 3455582"/>
+                <a:gd name="csY8" fmla="*/ 319302 h 319302"/>
+              </a:gdLst>
+              <a:ahLst/>
+              <a:cxnLst>
+                <a:cxn ang="0">
+                  <a:pos x="csX0" y="csY0"/>
+                </a:cxn>
+                <a:cxn ang="0">
+                  <a:pos x="csX1" y="csY1"/>
+                </a:cxn>
+                <a:cxn ang="0">
+                  <a:pos x="csX2" y="csY2"/>
+                </a:cxn>
+                <a:cxn ang="0">
+                  <a:pos x="csX3" y="csY3"/>
+                </a:cxn>
+                <a:cxn ang="0">
+                  <a:pos x="csX4" y="csY4"/>
+                </a:cxn>
+                <a:cxn ang="0">
+                  <a:pos x="csX5" y="csY5"/>
+                </a:cxn>
+                <a:cxn ang="0">
+                  <a:pos x="csX6" y="csY6"/>
+                </a:cxn>
+                <a:cxn ang="0">
+                  <a:pos x="csX7" y="csY7"/>
+                </a:cxn>
+                <a:cxn ang="0">
+                  <a:pos x="csX8" y="csY8"/>
+                </a:cxn>
+              </a:cxnLst>
+              <a:rect l="l" t="t" r="r" b="b"/>
+              <a:pathLst>
+                <a:path w="3455582" h="319302">
+                  <a:moveTo>
+                    <a:pt x="0" y="212977"/>
+                  </a:moveTo>
+                  <a:cubicBezTo>
+                    <a:pt x="168348" y="103107"/>
+                    <a:pt x="336697" y="-6763"/>
+                    <a:pt x="499730" y="325"/>
+                  </a:cubicBezTo>
+                  <a:cubicBezTo>
+                    <a:pt x="662763" y="7413"/>
+                    <a:pt x="832884" y="253735"/>
+                    <a:pt x="978196" y="255507"/>
+                  </a:cubicBezTo>
+                  <a:cubicBezTo>
+                    <a:pt x="1123508" y="257279"/>
+                    <a:pt x="1244009" y="10958"/>
+                    <a:pt x="1371600" y="10958"/>
+                  </a:cubicBezTo>
+                  <a:cubicBezTo>
+                    <a:pt x="1499191" y="10958"/>
+                    <a:pt x="1617921" y="251963"/>
+                    <a:pt x="1743740" y="255507"/>
+                  </a:cubicBezTo>
+                  <a:cubicBezTo>
+                    <a:pt x="1869559" y="259051"/>
+                    <a:pt x="1990061" y="25135"/>
+                    <a:pt x="2126512" y="32223"/>
+                  </a:cubicBezTo>
+                  <a:cubicBezTo>
+                    <a:pt x="2262963" y="39311"/>
+                    <a:pt x="2408275" y="292721"/>
+                    <a:pt x="2562447" y="298037"/>
+                  </a:cubicBezTo>
+                  <a:cubicBezTo>
+                    <a:pt x="2716619" y="303353"/>
+                    <a:pt x="2902688" y="60577"/>
+                    <a:pt x="3051544" y="64121"/>
+                  </a:cubicBezTo>
+                  <a:cubicBezTo>
+                    <a:pt x="3200400" y="67665"/>
+                    <a:pt x="3327991" y="193483"/>
+                    <a:pt x="3455582" y="319302"/>
+                  </a:cubicBezTo>
+                </a:path>
+              </a:pathLst>
+            </a:custGeom>
+            <a:noFill/>
+            <a:ln w="28575">
+              <a:solidFill>
+                <a:srgbClr val="C00000"/>
+              </a:solidFill>
+              <a:prstDash val="solid"/>
+            </a:ln>
+          </p:spPr>
+          <p:style>
+            <a:lnRef idx="2">
+              <a:schemeClr val="accent1">
+                <a:shade val="15000"/>
+              </a:schemeClr>
+            </a:lnRef>
+            <a:fillRef idx="1">
+              <a:schemeClr val="accent1"/>
+            </a:fillRef>
+            <a:effectRef idx="0">
+              <a:schemeClr val="accent1"/>
+            </a:effectRef>
+            <a:fontRef idx="minor">
+              <a:schemeClr val="lt1"/>
+            </a:fontRef>
+          </p:style>
+          <p:txBody>
+            <a:bodyPr rtlCol="0" anchor="ctr"/>
+            <a:lstStyle/>
+            <a:p>
+              <a:pPr algn="ctr"/>
+              <a:endParaRPr lang="en-US"/>
+            </a:p>
+          </p:txBody>
+        </p:sp>
+        <p:sp>
+          <p:nvSpPr>
+            <p:cNvPr id="22" name="TextBox 21">
+              <a:extLst>
+                <a:ext uri="{FF2B5EF4-FFF2-40B4-BE49-F238E27FC236}">
+                  <a16:creationId xmlns:a16="http://schemas.microsoft.com/office/drawing/2014/main" id="{0C130289-B5D6-DC52-D4C1-E0F02B3E0C33}"/>
+                </a:ext>
+              </a:extLst>
+            </p:cNvPr>
+            <p:cNvSpPr txBox="1"/>
+            <p:nvPr/>
+          </p:nvSpPr>
+          <p:spPr>
+            <a:xfrm>
+              <a:off x="1338027" y="1240375"/>
+              <a:ext cx="1747528" cy="307777"/>
+            </a:xfrm>
+            <a:prstGeom prst="rect">
+              <a:avLst/>
+            </a:prstGeom>
+            <a:noFill/>
+          </p:spPr>
+          <p:txBody>
+            <a:bodyPr wrap="square" rtlCol="0" anchor="ctr">
+              <a:spAutoFit/>
+            </a:bodyPr>
+            <a:lstStyle/>
+            <a:p>
+              <a:pPr algn="ctr"/>
+              <a:r>
+                <a:rPr lang="en-US" sz="1400" dirty="0">
+                  <a:latin typeface=""/>
+                </a:rPr>
+                <a:t>active layer</a:t>
+              </a:r>
+            </a:p>
+          </p:txBody>
+        </p:sp>
+        <p:sp>
+          <p:nvSpPr>
+            <p:cNvPr id="23" name="TextBox 22">
+              <a:extLst>
+                <a:ext uri="{FF2B5EF4-FFF2-40B4-BE49-F238E27FC236}">
+                  <a16:creationId xmlns:a16="http://schemas.microsoft.com/office/drawing/2014/main" id="{79DCA69B-4D89-158C-7625-2A192389CAFE}"/>
+                </a:ext>
+              </a:extLst>
+            </p:cNvPr>
+            <p:cNvSpPr txBox="1"/>
+            <p:nvPr/>
+          </p:nvSpPr>
+          <p:spPr>
+            <a:xfrm>
+              <a:off x="1442389" y="1887157"/>
+              <a:ext cx="1747528" cy="307777"/>
+            </a:xfrm>
+            <a:prstGeom prst="rect">
+              <a:avLst/>
+            </a:prstGeom>
+            <a:noFill/>
+          </p:spPr>
+          <p:txBody>
+            <a:bodyPr wrap="square" rtlCol="0" anchor="ctr">
+              <a:spAutoFit/>
+            </a:bodyPr>
+            <a:lstStyle/>
+            <a:p>
+              <a:pPr algn="ctr"/>
+              <a:r>
+                <a:rPr lang="en-US" sz="1400" dirty="0">
+                  <a:latin typeface=""/>
+                </a:rPr>
+                <a:t>permafrost</a:t>
+              </a:r>
+            </a:p>
+          </p:txBody>
+        </p:sp>
+      </p:grpSp>
+      <p:cxnSp>
+        <p:nvCxnSpPr>
+          <p:cNvPr id="32" name="Straight Arrow Connector 31">
+            <a:extLst>
+              <a:ext uri="{FF2B5EF4-FFF2-40B4-BE49-F238E27FC236}">
+                <a16:creationId xmlns:a16="http://schemas.microsoft.com/office/drawing/2014/main" id="{A9213716-ED12-6A97-89A6-09412A725928}"/>
+              </a:ext>
+            </a:extLst>
+          </p:cNvPr>
+          <p:cNvCxnSpPr>
+            <a:cxnSpLocks/>
+            <a:stCxn id="13" idx="3"/>
+            <a:endCxn id="15" idx="1"/>
+          </p:cNvCxnSpPr>
+          <p:nvPr/>
+        </p:nvCxnSpPr>
+        <p:spPr>
+          <a:xfrm>
+            <a:off x="4383275" y="2029132"/>
+            <a:ext cx="3200647" cy="6474"/>
+          </a:xfrm>
+          <a:prstGeom prst="straightConnector1">
+            <a:avLst/>
+          </a:prstGeom>
+          <a:ln w="28575">
+            <a:solidFill>
+              <a:schemeClr val="tx1"/>
+            </a:solidFill>
+            <a:tailEnd type="triangle"/>
+          </a:ln>
+        </p:spPr>
+        <p:style>
+          <a:lnRef idx="2">
+            <a:schemeClr val="accent1"/>
+          </a:lnRef>
+          <a:fillRef idx="0">
+            <a:schemeClr val="accent1"/>
+          </a:fillRef>
+          <a:effectRef idx="1">
+            <a:schemeClr val="accent1"/>
+          </a:effectRef>
+          <a:fontRef idx="minor">
+            <a:schemeClr val="tx1"/>
+          </a:fontRef>
+        </p:style>
+      </p:cxnSp>
+      <p:sp>
+        <p:nvSpPr>
+          <p:cNvPr id="36" name="TextBox 35">
+            <a:extLst>
+              <a:ext uri="{FF2B5EF4-FFF2-40B4-BE49-F238E27FC236}">
+                <a16:creationId xmlns:a16="http://schemas.microsoft.com/office/drawing/2014/main" id="{DE00EB03-AF4E-C603-982A-18493E3F89E6}"/>
+              </a:ext>
+            </a:extLst>
+          </p:cNvPr>
+          <p:cNvSpPr txBox="1"/>
+          <p:nvPr/>
+        </p:nvSpPr>
+        <p:spPr>
+          <a:xfrm>
+            <a:off x="8069249" y="6466838"/>
+            <a:ext cx="1393853" cy="307777"/>
+          </a:xfrm>
+          <a:prstGeom prst="rect">
+            <a:avLst/>
+          </a:prstGeom>
+          <a:noFill/>
+        </p:spPr>
+        <p:txBody>
+          <a:bodyPr wrap="square" rtlCol="0" anchor="ctr">
+            <a:spAutoFit/>
+          </a:bodyPr>
+          <a:lstStyle/>
+          <a:p>
+            <a:r>
+              <a:rPr lang="en-US" sz="1400" dirty="0">
+                <a:latin typeface=""/>
+              </a:rPr>
+              <a:t>initial position</a:t>
+            </a:r>
+          </a:p>
+        </p:txBody>
+      </p:sp>
+      <p:cxnSp>
+        <p:nvCxnSpPr>
+          <p:cNvPr id="38" name="Straight Connector 37">
+            <a:extLst>
+              <a:ext uri="{FF2B5EF4-FFF2-40B4-BE49-F238E27FC236}">
+                <a16:creationId xmlns:a16="http://schemas.microsoft.com/office/drawing/2014/main" id="{436E6C84-3387-7BE9-650A-A58440153D05}"/>
+              </a:ext>
+            </a:extLst>
+          </p:cNvPr>
+          <p:cNvCxnSpPr>
+            <a:cxnSpLocks/>
+          </p:cNvCxnSpPr>
+          <p:nvPr/>
+        </p:nvCxnSpPr>
+        <p:spPr>
+          <a:xfrm>
+            <a:off x="7590645" y="6616628"/>
+            <a:ext cx="478604" cy="0"/>
+          </a:xfrm>
+          <a:prstGeom prst="line">
+            <a:avLst/>
+          </a:prstGeom>
+          <a:ln w="28575">
+            <a:solidFill>
+              <a:schemeClr val="tx1"/>
+            </a:solidFill>
+            <a:prstDash val="sysDot"/>
+          </a:ln>
+        </p:spPr>
+        <p:style>
+          <a:lnRef idx="2">
+            <a:schemeClr val="accent1"/>
+          </a:lnRef>
+          <a:fillRef idx="0">
+            <a:schemeClr val="accent1"/>
+          </a:fillRef>
+          <a:effectRef idx="1">
+            <a:schemeClr val="accent1"/>
+          </a:effectRef>
+          <a:fontRef idx="minor">
+            <a:schemeClr val="tx1"/>
+          </a:fontRef>
+        </p:style>
+      </p:cxnSp>
+      <p:cxnSp>
+        <p:nvCxnSpPr>
+          <p:cNvPr id="39" name="Straight Connector 38">
+            <a:extLst>
+              <a:ext uri="{FF2B5EF4-FFF2-40B4-BE49-F238E27FC236}">
+                <a16:creationId xmlns:a16="http://schemas.microsoft.com/office/drawing/2014/main" id="{EEC144B2-61EA-8478-6281-AD269458FC43}"/>
+              </a:ext>
+            </a:extLst>
+          </p:cNvPr>
+          <p:cNvCxnSpPr>
+            <a:cxnSpLocks/>
+          </p:cNvCxnSpPr>
+          <p:nvPr/>
+        </p:nvCxnSpPr>
+        <p:spPr>
+          <a:xfrm>
+            <a:off x="9428297" y="6603574"/>
+            <a:ext cx="478604" cy="0"/>
+          </a:xfrm>
+          <a:prstGeom prst="line">
+            <a:avLst/>
+          </a:prstGeom>
+          <a:ln w="28575">
+            <a:solidFill>
+              <a:schemeClr val="tx1"/>
+            </a:solidFill>
+            <a:prstDash val="solid"/>
+          </a:ln>
+        </p:spPr>
+        <p:style>
+          <a:lnRef idx="2">
+            <a:schemeClr val="accent1"/>
+          </a:lnRef>
+          <a:fillRef idx="0">
+            <a:schemeClr val="accent1"/>
+          </a:fillRef>
+          <a:effectRef idx="1">
+            <a:schemeClr val="accent1"/>
+          </a:effectRef>
+          <a:fontRef idx="minor">
+            <a:schemeClr val="tx1"/>
+          </a:fontRef>
+        </p:style>
+      </p:cxnSp>
+      <p:sp>
+        <p:nvSpPr>
+          <p:cNvPr id="40" name="TextBox 39">
+            <a:extLst>
+              <a:ext uri="{FF2B5EF4-FFF2-40B4-BE49-F238E27FC236}">
+                <a16:creationId xmlns:a16="http://schemas.microsoft.com/office/drawing/2014/main" id="{76938C6E-384E-A364-6AD8-8DF1BD7539D6}"/>
+              </a:ext>
+            </a:extLst>
+          </p:cNvPr>
+          <p:cNvSpPr txBox="1"/>
+          <p:nvPr/>
+        </p:nvSpPr>
+        <p:spPr>
+          <a:xfrm>
+            <a:off x="9906901" y="6463507"/>
+            <a:ext cx="1393853" cy="307777"/>
+          </a:xfrm>
+          <a:prstGeom prst="rect">
+            <a:avLst/>
+          </a:prstGeom>
+          <a:noFill/>
+        </p:spPr>
+        <p:txBody>
+          <a:bodyPr wrap="square" rtlCol="0" anchor="ctr">
+            <a:spAutoFit/>
+          </a:bodyPr>
+          <a:lstStyle/>
+          <a:p>
+            <a:r>
+              <a:rPr lang="en-US" sz="1400" dirty="0">
+                <a:latin typeface=""/>
+              </a:rPr>
+              <a:t>later position</a:t>
+            </a:r>
+          </a:p>
+        </p:txBody>
+      </p:sp>
+      <p:cxnSp>
+        <p:nvCxnSpPr>
+          <p:cNvPr id="55" name="Straight Connector 54">
+            <a:extLst>
+              <a:ext uri="{FF2B5EF4-FFF2-40B4-BE49-F238E27FC236}">
+                <a16:creationId xmlns:a16="http://schemas.microsoft.com/office/drawing/2014/main" id="{2C030860-3185-15BD-18D2-7E5AC194AD6D}"/>
+              </a:ext>
+            </a:extLst>
+          </p:cNvPr>
+          <p:cNvCxnSpPr>
+            <a:stCxn id="165" idx="0"/>
+          </p:cNvCxnSpPr>
+          <p:nvPr/>
+        </p:nvCxnSpPr>
+        <p:spPr>
+          <a:xfrm flipH="1" flipV="1">
+            <a:off x="5971233" y="2035605"/>
+            <a:ext cx="1" cy="1173791"/>
+          </a:xfrm>
+          <a:prstGeom prst="line">
+            <a:avLst/>
+          </a:prstGeom>
+          <a:ln w="19050">
+            <a:solidFill>
+              <a:schemeClr val="tx1"/>
+            </a:solidFill>
+            <a:prstDash val="dashDot"/>
+          </a:ln>
+        </p:spPr>
+        <p:style>
+          <a:lnRef idx="2">
+            <a:schemeClr val="accent1"/>
+          </a:lnRef>
+          <a:fillRef idx="0">
+            <a:schemeClr val="accent1"/>
+          </a:fillRef>
+          <a:effectRef idx="1">
+            <a:schemeClr val="accent1"/>
+          </a:effectRef>
+          <a:fontRef idx="minor">
+            <a:schemeClr val="tx1"/>
+          </a:fontRef>
+        </p:style>
+      </p:cxnSp>
+      <p:cxnSp>
+        <p:nvCxnSpPr>
+          <p:cNvPr id="56" name="Straight Connector 55">
+            <a:extLst>
+              <a:ext uri="{FF2B5EF4-FFF2-40B4-BE49-F238E27FC236}">
+                <a16:creationId xmlns:a16="http://schemas.microsoft.com/office/drawing/2014/main" id="{66EF4F75-B0B2-C3B8-61B1-3B5A103F5473}"/>
+              </a:ext>
+            </a:extLst>
+          </p:cNvPr>
+          <p:cNvCxnSpPr>
+            <a:cxnSpLocks/>
+            <a:endCxn id="165" idx="2"/>
+          </p:cNvCxnSpPr>
+          <p:nvPr/>
+        </p:nvCxnSpPr>
+        <p:spPr>
+          <a:xfrm flipV="1">
+            <a:off x="5971234" y="4150519"/>
+            <a:ext cx="0" cy="1159634"/>
+          </a:xfrm>
+          <a:prstGeom prst="line">
+            <a:avLst/>
+          </a:prstGeom>
+          <a:ln w="19050">
+            <a:solidFill>
+              <a:schemeClr val="tx1"/>
+            </a:solidFill>
+            <a:prstDash val="dashDot"/>
           </a:ln>
         </p:spPr>
         <p:style>
